--- a/docs/TimeBaiBai_Service_Overview_EN.pptx
+++ b/docs/TimeBaiBai_Service_Overview_EN.pptx
@@ -4420,8 +4420,8 @@
         </p:blipFill>
         <p:spPr>
           <a:xfrm>
-            <a:off x="1556256" y="1188720"/>
-            <a:ext cx="5117086" cy="5120640"/>
+            <a:off x="1683635" y="1188720"/>
+            <a:ext cx="4862328" cy="5120640"/>
           </a:xfrm>
           <a:prstGeom prst="rect">
             <a:avLst/>
